--- a/Sprint_Review_Inteligente.pptx
+++ b/Sprint_Review_Inteligente.pptx
@@ -3197,25 +3197,25 @@
           <a:p>
             <a:pPr lvl="1"/>
             <a:r>
-              <a:t>Funcionalidade principal de geração de slides PPTX a partir de texto</a:t>
+              <a:t>Geração dinâmica de apresentações PPTX a partir de conteúdo textual</a:t>
             </a:r>
           </a:p>
           <a:p>
             <a:pPr lvl="1"/>
             <a:r>
-              <a:t>Integração da IA Gemini para sumarização inteligente de conteúdo</a:t>
+              <a:t>Integração de Inteligência Artificial Gemini para sumarização inteligente de slides</a:t>
             </a:r>
           </a:p>
           <a:p>
             <a:pPr lvl="1"/>
             <a:r>
-              <a:t>Aprimoramento da IA para transformar dados brutos em tópicos executivos</a:t>
+              <a:t>Aprimorada a capacidade da IA em traduzir dados técnicos para linguagem de negócios</a:t>
             </a:r>
           </a:p>
           <a:p>
             <a:pPr lvl="1"/>
             <a:r>
-              <a:t>Otimização e estabilização da integração da IA, resolvendo erros críticos</a:t>
+              <a:t>Garantida a estabilidade e performance da IA através de atualizações críticas e correção de erros</a:t>
             </a:r>
           </a:p>
         </p:txBody>

--- a/Sprint_Review_Inteligente.pptx
+++ b/Sprint_Review_Inteligente.pptx
@@ -3197,25 +3197,25 @@
           <a:p>
             <a:pPr lvl="1"/>
             <a:r>
-              <a:t>Geração dinâmica de apresentações PPTX a partir de conteúdo textual</a:t>
+              <a:t>Implementação da geração de apresentações PPTX a partir de texto</a:t>
             </a:r>
           </a:p>
           <a:p>
             <a:pPr lvl="1"/>
             <a:r>
-              <a:t>Integração de Inteligência Artificial Gemini para sumarização inteligente de slides</a:t>
+              <a:t>Integração da inteligência artificial Google Gemini para sumarização de conteúdo</a:t>
             </a:r>
           </a:p>
           <a:p>
             <a:pPr lvl="1"/>
             <a:r>
-              <a:t>Aprimorada a capacidade da IA em traduzir dados técnicos para linguagem de negócios</a:t>
+              <a:t>Otimização e estabilização da integração Gemini, eliminando erros críticos</a:t>
             </a:r>
           </a:p>
           <a:p>
             <a:pPr lvl="1"/>
             <a:r>
-              <a:t>Garantida a estabilidade e performance da IA através de atualizações críticas e correção de erros</a:t>
+              <a:t>Melhoria da qualidade dos tópicos gerados pela IA via engenharia de prompts</a:t>
             </a:r>
           </a:p>
         </p:txBody>
